--- a/figures/phaseset_motivation.pptx
+++ b/figures/phaseset_motivation.pptx
@@ -7,7 +7,7 @@
   <p:sldIdLst>
     <p:sldId id="256" r:id="rId7"/>
   </p:sldIdLst>
-  <p:sldSz cx="12191999" cy="5900667" type="screen4x3"/>
+  <p:sldSz cx="14630400" cy="6949440" type="screen4x3"/>
   <p:notesSz cx="6858000" cy="9144000"/>
   <p:defaultTextStyle>
     <a:defPPr>
@@ -3088,30 +3088,2014 @@
         <p:nvPr/>
       </p:nvGrpSpPr>
       <p:grpSpPr/>
-      <p:pic>
-        <p:nvPicPr>
-          <p:cNvPr id="2" name="Picture 1" descr="phaseset_motivation.png"/>
-          <p:cNvPicPr>
-            <a:picLocks noChangeAspect="1"/>
-          </p:cNvPicPr>
+      <p:sp>
+        <p:nvSpPr>
+          <p:cNvPr id="2" name="drawio-node-3"/>
+          <p:cNvSpPr/>
           <p:nvPr/>
-        </p:nvPicPr>
-        <p:blipFill>
-          <a:blip r:embed="rId2"/>
-          <a:stretch>
-            <a:fillRect/>
-          </a:stretch>
-        </p:blipFill>
-        <p:spPr>
-          <a:xfrm>
-            <a:off x="0" y="0"/>
-            <a:ext cx="12191999" cy="5900667"/>
+        </p:nvSpPr>
+        <p:spPr>
+          <a:xfrm>
+            <a:off x="548640" y="731520"/>
+            <a:ext cx="6400800" cy="4389120"/>
+          </a:xfrm>
+          <a:prstGeom prst="roundRect">
+            <a:avLst>
+              <a:gd name="adj" fmla="val 8000"/>
+            </a:avLst>
+          </a:prstGeom>
+          <a:solidFill>
+            <a:srgbClr val="F8FAFD"/>
+          </a:solidFill>
+          <a:ln w="18288">
+            <a:solidFill>
+              <a:srgbClr val="7792B8"/>
+            </a:solidFill>
+          </a:ln>
+        </p:spPr>
+        <p:style>
+          <a:lnRef idx="1">
+            <a:schemeClr val="accent1"/>
+          </a:lnRef>
+          <a:fillRef idx="3">
+            <a:schemeClr val="accent1"/>
+          </a:fillRef>
+          <a:effectRef idx="2">
+            <a:schemeClr val="accent1"/>
+          </a:effectRef>
+          <a:fontRef idx="minor">
+            <a:schemeClr val="lt1"/>
+          </a:fontRef>
+        </p:style>
+        <p:txBody>
+          <a:bodyPr rtlCol="0" anchor="ctr"/>
+          <a:lstStyle/>
+          <a:p>
+            <a:pPr algn="ctr"/>
+          </a:p>
+        </p:txBody>
+      </p:sp>
+      <p:sp>
+        <p:nvSpPr>
+          <p:cNvPr id="3" name="drawio-header-3"/>
+          <p:cNvSpPr txBox="1"/>
+          <p:nvPr/>
+        </p:nvSpPr>
+        <p:spPr>
+          <a:xfrm>
+            <a:off x="548640" y="731520"/>
+            <a:ext cx="6400800" cy="384048"/>
           </a:xfrm>
           <a:prstGeom prst="rect">
             <a:avLst/>
           </a:prstGeom>
-        </p:spPr>
-      </p:pic>
+          <a:noFill/>
+        </p:spPr>
+        <p:txBody>
+          <a:bodyPr wrap="square" lIns="27432" rIns="27432" tIns="9144" bIns="9144" anchor="ctr">
+            <a:spAutoFit/>
+          </a:bodyPr>
+          <a:lstStyle/>
+          <a:p>
+            <a:pPr algn="ctr">
+              <a:spcBef>
+                <a:spcPts val="0"/>
+              </a:spcBef>
+              <a:spcAft>
+                <a:spcPts val="0"/>
+              </a:spcAft>
+            </a:pPr>
+            <a:r>
+              <a:rPr sz="1296" b="1">
+                <a:solidFill>
+                  <a:srgbClr val="000000"/>
+                </a:solidFill>
+                <a:latin typeface="Arial"/>
+              </a:rPr>
+              <a:t>Group A: balanced incidence</a:t>
+            </a:r>
+          </a:p>
+        </p:txBody>
+      </p:sp>
+      <p:cxnSp>
+        <p:nvCxnSpPr>
+          <p:cNvPr id="4" name="drawio-container-separator-3"/>
+          <p:cNvCxnSpPr/>
+          <p:nvPr/>
+        </p:nvCxnSpPr>
+        <p:spPr>
+          <a:xfrm>
+            <a:off x="548640" y="1115568"/>
+            <a:ext cx="6400800" cy="0"/>
+          </a:xfrm>
+          <a:prstGeom prst="line">
+            <a:avLst/>
+          </a:prstGeom>
+          <a:ln w="18288">
+            <a:solidFill>
+              <a:srgbClr val="7792B8"/>
+            </a:solidFill>
+          </a:ln>
+        </p:spPr>
+        <p:style>
+          <a:lnRef idx="2">
+            <a:schemeClr val="accent1"/>
+          </a:lnRef>
+          <a:fillRef idx="0">
+            <a:schemeClr val="accent1"/>
+          </a:fillRef>
+          <a:effectRef idx="1">
+            <a:schemeClr val="accent1"/>
+          </a:effectRef>
+          <a:fontRef idx="minor">
+            <a:schemeClr val="tx1"/>
+          </a:fontRef>
+        </p:style>
+      </p:cxnSp>
+      <p:sp>
+        <p:nvSpPr>
+          <p:cNvPr id="5" name="drawio-node-4"/>
+          <p:cNvSpPr/>
+          <p:nvPr/>
+        </p:nvSpPr>
+        <p:spPr>
+          <a:xfrm>
+            <a:off x="7680960" y="731520"/>
+            <a:ext cx="6400800" cy="4389120"/>
+          </a:xfrm>
+          <a:prstGeom prst="roundRect">
+            <a:avLst>
+              <a:gd name="adj" fmla="val 8000"/>
+            </a:avLst>
+          </a:prstGeom>
+          <a:solidFill>
+            <a:srgbClr val="F8FAFD"/>
+          </a:solidFill>
+          <a:ln w="18288">
+            <a:solidFill>
+              <a:srgbClr val="7792B8"/>
+            </a:solidFill>
+          </a:ln>
+        </p:spPr>
+        <p:style>
+          <a:lnRef idx="1">
+            <a:schemeClr val="accent1"/>
+          </a:lnRef>
+          <a:fillRef idx="3">
+            <a:schemeClr val="accent1"/>
+          </a:fillRef>
+          <a:effectRef idx="2">
+            <a:schemeClr val="accent1"/>
+          </a:effectRef>
+          <a:fontRef idx="minor">
+            <a:schemeClr val="lt1"/>
+          </a:fontRef>
+        </p:style>
+        <p:txBody>
+          <a:bodyPr rtlCol="0" anchor="ctr"/>
+          <a:lstStyle/>
+          <a:p>
+            <a:pPr algn="ctr"/>
+          </a:p>
+        </p:txBody>
+      </p:sp>
+      <p:sp>
+        <p:nvSpPr>
+          <p:cNvPr id="6" name="drawio-header-4"/>
+          <p:cNvSpPr txBox="1"/>
+          <p:nvPr/>
+        </p:nvSpPr>
+        <p:spPr>
+          <a:xfrm>
+            <a:off x="7680960" y="731520"/>
+            <a:ext cx="6400800" cy="384048"/>
+          </a:xfrm>
+          <a:prstGeom prst="rect">
+            <a:avLst/>
+          </a:prstGeom>
+          <a:noFill/>
+        </p:spPr>
+        <p:txBody>
+          <a:bodyPr wrap="square" lIns="27432" rIns="27432" tIns="9144" bIns="9144" anchor="ctr">
+            <a:spAutoFit/>
+          </a:bodyPr>
+          <a:lstStyle/>
+          <a:p>
+            <a:pPr algn="ctr">
+              <a:spcBef>
+                <a:spcPts val="0"/>
+              </a:spcBef>
+              <a:spcAft>
+                <a:spcPts val="0"/>
+              </a:spcAft>
+            </a:pPr>
+            <a:r>
+              <a:rPr sz="1296" b="1">
+                <a:solidFill>
+                  <a:srgbClr val="000000"/>
+                </a:solidFill>
+                <a:latin typeface="Arial"/>
+              </a:rPr>
+              <a:t>Group B: concentrated incidence</a:t>
+            </a:r>
+          </a:p>
+        </p:txBody>
+      </p:sp>
+      <p:cxnSp>
+        <p:nvCxnSpPr>
+          <p:cNvPr id="7" name="drawio-container-separator-4"/>
+          <p:cNvCxnSpPr/>
+          <p:nvPr/>
+        </p:nvCxnSpPr>
+        <p:spPr>
+          <a:xfrm>
+            <a:off x="7680960" y="1115568"/>
+            <a:ext cx="6400800" cy="0"/>
+          </a:xfrm>
+          <a:prstGeom prst="line">
+            <a:avLst/>
+          </a:prstGeom>
+          <a:ln w="18288">
+            <a:solidFill>
+              <a:srgbClr val="7792B8"/>
+            </a:solidFill>
+          </a:ln>
+        </p:spPr>
+        <p:style>
+          <a:lnRef idx="2">
+            <a:schemeClr val="accent1"/>
+          </a:lnRef>
+          <a:fillRef idx="0">
+            <a:schemeClr val="accent1"/>
+          </a:fillRef>
+          <a:effectRef idx="1">
+            <a:schemeClr val="accent1"/>
+          </a:effectRef>
+          <a:fontRef idx="minor">
+            <a:schemeClr val="tx1"/>
+          </a:fontRef>
+        </p:style>
+      </p:cxnSp>
+      <p:cxnSp>
+        <p:nvCxnSpPr>
+          <p:cNvPr id="8" name="drawio-edge-10-segment-0"/>
+          <p:cNvCxnSpPr/>
+          <p:nvPr/>
+        </p:nvCxnSpPr>
+        <p:spPr>
+          <a:xfrm>
+            <a:off x="2468880" y="1828800"/>
+            <a:ext cx="2560320" cy="0"/>
+          </a:xfrm>
+          <a:prstGeom prst="line">
+            <a:avLst/>
+          </a:prstGeom>
+          <a:ln w="36576">
+            <a:solidFill>
+              <a:srgbClr val="D95F5F"/>
+            </a:solidFill>
+          </a:ln>
+        </p:spPr>
+        <p:style>
+          <a:lnRef idx="2">
+            <a:schemeClr val="accent1"/>
+          </a:lnRef>
+          <a:fillRef idx="0">
+            <a:schemeClr val="accent1"/>
+          </a:fillRef>
+          <a:effectRef idx="1">
+            <a:schemeClr val="accent1"/>
+          </a:effectRef>
+          <a:fontRef idx="minor">
+            <a:schemeClr val="tx1"/>
+          </a:fontRef>
+        </p:style>
+      </p:cxnSp>
+      <p:cxnSp>
+        <p:nvCxnSpPr>
+          <p:cNvPr id="9" name="drawio-edge-11-segment-0"/>
+          <p:cNvCxnSpPr/>
+          <p:nvPr/>
+        </p:nvCxnSpPr>
+        <p:spPr>
+          <a:xfrm>
+            <a:off x="2103120" y="2194560"/>
+            <a:ext cx="0" cy="1097280"/>
+          </a:xfrm>
+          <a:prstGeom prst="line">
+            <a:avLst/>
+          </a:prstGeom>
+          <a:ln w="36576">
+            <a:solidFill>
+              <a:srgbClr val="4D83C4"/>
+            </a:solidFill>
+          </a:ln>
+        </p:spPr>
+        <p:style>
+          <a:lnRef idx="2">
+            <a:schemeClr val="accent1"/>
+          </a:lnRef>
+          <a:fillRef idx="0">
+            <a:schemeClr val="accent1"/>
+          </a:fillRef>
+          <a:effectRef idx="1">
+            <a:schemeClr val="accent1"/>
+          </a:effectRef>
+          <a:fontRef idx="minor">
+            <a:schemeClr val="tx1"/>
+          </a:fontRef>
+        </p:style>
+      </p:cxnSp>
+      <p:cxnSp>
+        <p:nvCxnSpPr>
+          <p:cNvPr id="10" name="drawio-edge-12-segment-0"/>
+          <p:cNvCxnSpPr/>
+          <p:nvPr/>
+        </p:nvCxnSpPr>
+        <p:spPr>
+          <a:xfrm>
+            <a:off x="2422852" y="2006429"/>
+            <a:ext cx="2652376" cy="1473542"/>
+          </a:xfrm>
+          <a:prstGeom prst="line">
+            <a:avLst/>
+          </a:prstGeom>
+          <a:ln w="36576">
+            <a:solidFill>
+              <a:srgbClr val="7A7F89"/>
+            </a:solidFill>
+          </a:ln>
+        </p:spPr>
+        <p:style>
+          <a:lnRef idx="2">
+            <a:schemeClr val="accent1"/>
+          </a:lnRef>
+          <a:fillRef idx="0">
+            <a:schemeClr val="accent1"/>
+          </a:fillRef>
+          <a:effectRef idx="1">
+            <a:schemeClr val="accent1"/>
+          </a:effectRef>
+          <a:fontRef idx="minor">
+            <a:schemeClr val="tx1"/>
+          </a:fontRef>
+        </p:style>
+      </p:cxnSp>
+      <p:cxnSp>
+        <p:nvCxnSpPr>
+          <p:cNvPr id="11" name="drawio-edge-13-segment-0"/>
+          <p:cNvCxnSpPr/>
+          <p:nvPr/>
+        </p:nvCxnSpPr>
+        <p:spPr>
+          <a:xfrm flipH="1">
+            <a:off x="2422852" y="2006429"/>
+            <a:ext cx="2652376" cy="1473542"/>
+          </a:xfrm>
+          <a:prstGeom prst="line">
+            <a:avLst/>
+          </a:prstGeom>
+          <a:ln w="36576">
+            <a:solidFill>
+              <a:srgbClr val="7A7F89"/>
+            </a:solidFill>
+          </a:ln>
+        </p:spPr>
+        <p:style>
+          <a:lnRef idx="2">
+            <a:schemeClr val="accent1"/>
+          </a:lnRef>
+          <a:fillRef idx="0">
+            <a:schemeClr val="accent1"/>
+          </a:fillRef>
+          <a:effectRef idx="1">
+            <a:schemeClr val="accent1"/>
+          </a:effectRef>
+          <a:fontRef idx="minor">
+            <a:schemeClr val="tx1"/>
+          </a:fontRef>
+        </p:style>
+      </p:cxnSp>
+      <p:cxnSp>
+        <p:nvCxnSpPr>
+          <p:cNvPr id="12" name="drawio-edge-14-segment-0"/>
+          <p:cNvCxnSpPr/>
+          <p:nvPr/>
+        </p:nvCxnSpPr>
+        <p:spPr>
+          <a:xfrm>
+            <a:off x="5394960" y="2194560"/>
+            <a:ext cx="0" cy="1097280"/>
+          </a:xfrm>
+          <a:prstGeom prst="line">
+            <a:avLst/>
+          </a:prstGeom>
+          <a:ln w="36576">
+            <a:solidFill>
+              <a:srgbClr val="4D83C4"/>
+            </a:solidFill>
+          </a:ln>
+        </p:spPr>
+        <p:style>
+          <a:lnRef idx="2">
+            <a:schemeClr val="accent1"/>
+          </a:lnRef>
+          <a:fillRef idx="0">
+            <a:schemeClr val="accent1"/>
+          </a:fillRef>
+          <a:effectRef idx="1">
+            <a:schemeClr val="accent1"/>
+          </a:effectRef>
+          <a:fontRef idx="minor">
+            <a:schemeClr val="tx1"/>
+          </a:fontRef>
+        </p:style>
+      </p:cxnSp>
+      <p:cxnSp>
+        <p:nvCxnSpPr>
+          <p:cNvPr id="13" name="drawio-edge-15-segment-0"/>
+          <p:cNvCxnSpPr/>
+          <p:nvPr/>
+        </p:nvCxnSpPr>
+        <p:spPr>
+          <a:xfrm>
+            <a:off x="2468880" y="3657600"/>
+            <a:ext cx="2560320" cy="0"/>
+          </a:xfrm>
+          <a:prstGeom prst="line">
+            <a:avLst/>
+          </a:prstGeom>
+          <a:ln w="36576">
+            <a:solidFill>
+              <a:srgbClr val="D95F5F"/>
+            </a:solidFill>
+          </a:ln>
+        </p:spPr>
+        <p:style>
+          <a:lnRef idx="2">
+            <a:schemeClr val="accent1"/>
+          </a:lnRef>
+          <a:fillRef idx="0">
+            <a:schemeClr val="accent1"/>
+          </a:fillRef>
+          <a:effectRef idx="1">
+            <a:schemeClr val="accent1"/>
+          </a:effectRef>
+          <a:fontRef idx="minor">
+            <a:schemeClr val="tx1"/>
+          </a:fontRef>
+        </p:style>
+      </p:cxnSp>
+      <p:cxnSp>
+        <p:nvCxnSpPr>
+          <p:cNvPr id="14" name="drawio-edge-30-segment-0"/>
+          <p:cNvCxnSpPr/>
+          <p:nvPr/>
+        </p:nvCxnSpPr>
+        <p:spPr>
+          <a:xfrm>
+            <a:off x="9601200" y="1828800"/>
+            <a:ext cx="2560320" cy="0"/>
+          </a:xfrm>
+          <a:prstGeom prst="line">
+            <a:avLst/>
+          </a:prstGeom>
+          <a:ln w="36576">
+            <a:solidFill>
+              <a:srgbClr val="D95F5F"/>
+            </a:solidFill>
+          </a:ln>
+        </p:spPr>
+        <p:style>
+          <a:lnRef idx="2">
+            <a:schemeClr val="accent1"/>
+          </a:lnRef>
+          <a:fillRef idx="0">
+            <a:schemeClr val="accent1"/>
+          </a:fillRef>
+          <a:effectRef idx="1">
+            <a:schemeClr val="accent1"/>
+          </a:effectRef>
+          <a:fontRef idx="minor">
+            <a:schemeClr val="tx1"/>
+          </a:fontRef>
+        </p:style>
+      </p:cxnSp>
+      <p:cxnSp>
+        <p:nvCxnSpPr>
+          <p:cNvPr id="15" name="drawio-edge-31-segment-0"/>
+          <p:cNvCxnSpPr/>
+          <p:nvPr/>
+        </p:nvCxnSpPr>
+        <p:spPr>
+          <a:xfrm>
+            <a:off x="9235440" y="2194560"/>
+            <a:ext cx="0" cy="1097280"/>
+          </a:xfrm>
+          <a:prstGeom prst="line">
+            <a:avLst/>
+          </a:prstGeom>
+          <a:ln w="36576">
+            <a:solidFill>
+              <a:srgbClr val="D95F5F"/>
+            </a:solidFill>
+          </a:ln>
+        </p:spPr>
+        <p:style>
+          <a:lnRef idx="2">
+            <a:schemeClr val="accent1"/>
+          </a:lnRef>
+          <a:fillRef idx="0">
+            <a:schemeClr val="accent1"/>
+          </a:fillRef>
+          <a:effectRef idx="1">
+            <a:schemeClr val="accent1"/>
+          </a:effectRef>
+          <a:fontRef idx="minor">
+            <a:schemeClr val="tx1"/>
+          </a:fontRef>
+        </p:style>
+      </p:cxnSp>
+      <p:cxnSp>
+        <p:nvCxnSpPr>
+          <p:cNvPr id="16" name="drawio-edge-32-segment-0"/>
+          <p:cNvCxnSpPr/>
+          <p:nvPr/>
+        </p:nvCxnSpPr>
+        <p:spPr>
+          <a:xfrm>
+            <a:off x="9555172" y="2006429"/>
+            <a:ext cx="2652376" cy="1473542"/>
+          </a:xfrm>
+          <a:prstGeom prst="line">
+            <a:avLst/>
+          </a:prstGeom>
+          <a:ln w="36576">
+            <a:solidFill>
+              <a:srgbClr val="4D83C4"/>
+            </a:solidFill>
+          </a:ln>
+        </p:spPr>
+        <p:style>
+          <a:lnRef idx="2">
+            <a:schemeClr val="accent1"/>
+          </a:lnRef>
+          <a:fillRef idx="0">
+            <a:schemeClr val="accent1"/>
+          </a:fillRef>
+          <a:effectRef idx="1">
+            <a:schemeClr val="accent1"/>
+          </a:effectRef>
+          <a:fontRef idx="minor">
+            <a:schemeClr val="tx1"/>
+          </a:fontRef>
+        </p:style>
+      </p:cxnSp>
+      <p:cxnSp>
+        <p:nvCxnSpPr>
+          <p:cNvPr id="17" name="drawio-edge-33-segment-0"/>
+          <p:cNvCxnSpPr/>
+          <p:nvPr/>
+        </p:nvCxnSpPr>
+        <p:spPr>
+          <a:xfrm flipH="1">
+            <a:off x="9555172" y="2006429"/>
+            <a:ext cx="2652376" cy="1473542"/>
+          </a:xfrm>
+          <a:prstGeom prst="line">
+            <a:avLst/>
+          </a:prstGeom>
+          <a:ln w="36576">
+            <a:solidFill>
+              <a:srgbClr val="4D83C4"/>
+            </a:solidFill>
+          </a:ln>
+        </p:spPr>
+        <p:style>
+          <a:lnRef idx="2">
+            <a:schemeClr val="accent1"/>
+          </a:lnRef>
+          <a:fillRef idx="0">
+            <a:schemeClr val="accent1"/>
+          </a:fillRef>
+          <a:effectRef idx="1">
+            <a:schemeClr val="accent1"/>
+          </a:effectRef>
+          <a:fontRef idx="minor">
+            <a:schemeClr val="tx1"/>
+          </a:fontRef>
+        </p:style>
+      </p:cxnSp>
+      <p:cxnSp>
+        <p:nvCxnSpPr>
+          <p:cNvPr id="18" name="drawio-edge-34-segment-0"/>
+          <p:cNvCxnSpPr/>
+          <p:nvPr/>
+        </p:nvCxnSpPr>
+        <p:spPr>
+          <a:xfrm>
+            <a:off x="12527280" y="2194560"/>
+            <a:ext cx="0" cy="1097280"/>
+          </a:xfrm>
+          <a:prstGeom prst="line">
+            <a:avLst/>
+          </a:prstGeom>
+          <a:ln w="36576">
+            <a:solidFill>
+              <a:srgbClr val="7A7F89"/>
+            </a:solidFill>
+          </a:ln>
+        </p:spPr>
+        <p:style>
+          <a:lnRef idx="2">
+            <a:schemeClr val="accent1"/>
+          </a:lnRef>
+          <a:fillRef idx="0">
+            <a:schemeClr val="accent1"/>
+          </a:fillRef>
+          <a:effectRef idx="1">
+            <a:schemeClr val="accent1"/>
+          </a:effectRef>
+          <a:fontRef idx="minor">
+            <a:schemeClr val="tx1"/>
+          </a:fontRef>
+        </p:style>
+      </p:cxnSp>
+      <p:cxnSp>
+        <p:nvCxnSpPr>
+          <p:cNvPr id="19" name="drawio-edge-35-segment-0"/>
+          <p:cNvCxnSpPr/>
+          <p:nvPr/>
+        </p:nvCxnSpPr>
+        <p:spPr>
+          <a:xfrm>
+            <a:off x="9601200" y="3657600"/>
+            <a:ext cx="2560320" cy="0"/>
+          </a:xfrm>
+          <a:prstGeom prst="line">
+            <a:avLst/>
+          </a:prstGeom>
+          <a:ln w="36576">
+            <a:solidFill>
+              <a:srgbClr val="7A7F89"/>
+            </a:solidFill>
+          </a:ln>
+        </p:spPr>
+        <p:style>
+          <a:lnRef idx="2">
+            <a:schemeClr val="accent1"/>
+          </a:lnRef>
+          <a:fillRef idx="0">
+            <a:schemeClr val="accent1"/>
+          </a:fillRef>
+          <a:effectRef idx="1">
+            <a:schemeClr val="accent1"/>
+          </a:effectRef>
+          <a:fontRef idx="minor">
+            <a:schemeClr val="tx1"/>
+          </a:fontRef>
+        </p:style>
+      </p:cxnSp>
+      <p:cxnSp>
+        <p:nvCxnSpPr>
+          <p:cNvPr id="20" name="drawio-edge-53-segment-0"/>
+          <p:cNvCxnSpPr/>
+          <p:nvPr/>
+        </p:nvCxnSpPr>
+        <p:spPr>
+          <a:xfrm>
+            <a:off x="6766560" y="5715000"/>
+            <a:ext cx="457200" cy="0"/>
+          </a:xfrm>
+          <a:prstGeom prst="line">
+            <a:avLst/>
+          </a:prstGeom>
+          <a:ln w="18288">
+            <a:solidFill>
+              <a:srgbClr val="6B7280"/>
+            </a:solidFill>
+            <a:tailEnd type="triangle"/>
+          </a:ln>
+        </p:spPr>
+        <p:style>
+          <a:lnRef idx="2">
+            <a:schemeClr val="accent1"/>
+          </a:lnRef>
+          <a:fillRef idx="0">
+            <a:schemeClr val="accent1"/>
+          </a:fillRef>
+          <a:effectRef idx="1">
+            <a:schemeClr val="accent1"/>
+          </a:effectRef>
+          <a:fontRef idx="minor">
+            <a:schemeClr val="tx1"/>
+          </a:fontRef>
+        </p:style>
+      </p:cxnSp>
+      <p:cxnSp>
+        <p:nvCxnSpPr>
+          <p:cNvPr id="21" name="drawio-edge-54-segment-0"/>
+          <p:cNvCxnSpPr/>
+          <p:nvPr/>
+        </p:nvCxnSpPr>
+        <p:spPr>
+          <a:xfrm>
+            <a:off x="6172200" y="6309360"/>
+            <a:ext cx="228600" cy="274320"/>
+          </a:xfrm>
+          <a:prstGeom prst="line">
+            <a:avLst/>
+          </a:prstGeom>
+          <a:ln w="18288">
+            <a:solidFill>
+              <a:srgbClr val="6B7280"/>
+            </a:solidFill>
+          </a:ln>
+        </p:spPr>
+        <p:style>
+          <a:lnRef idx="2">
+            <a:schemeClr val="accent1"/>
+          </a:lnRef>
+          <a:fillRef idx="0">
+            <a:schemeClr val="accent1"/>
+          </a:fillRef>
+          <a:effectRef idx="1">
+            <a:schemeClr val="accent1"/>
+          </a:effectRef>
+          <a:fontRef idx="minor">
+            <a:schemeClr val="tx1"/>
+          </a:fontRef>
+        </p:style>
+      </p:cxnSp>
+      <p:cxnSp>
+        <p:nvCxnSpPr>
+          <p:cNvPr id="22" name="drawio-edge-54-segment-1"/>
+          <p:cNvCxnSpPr/>
+          <p:nvPr/>
+        </p:nvCxnSpPr>
+        <p:spPr>
+          <a:xfrm>
+            <a:off x="6400800" y="6583680"/>
+            <a:ext cx="3291840" cy="0"/>
+          </a:xfrm>
+          <a:prstGeom prst="line">
+            <a:avLst/>
+          </a:prstGeom>
+          <a:ln w="18288">
+            <a:solidFill>
+              <a:srgbClr val="6B7280"/>
+            </a:solidFill>
+          </a:ln>
+        </p:spPr>
+        <p:style>
+          <a:lnRef idx="2">
+            <a:schemeClr val="accent1"/>
+          </a:lnRef>
+          <a:fillRef idx="0">
+            <a:schemeClr val="accent1"/>
+          </a:fillRef>
+          <a:effectRef idx="1">
+            <a:schemeClr val="accent1"/>
+          </a:effectRef>
+          <a:fontRef idx="minor">
+            <a:schemeClr val="tx1"/>
+          </a:fontRef>
+        </p:style>
+      </p:cxnSp>
+      <p:cxnSp>
+        <p:nvCxnSpPr>
+          <p:cNvPr id="23" name="drawio-edge-54-segment-2"/>
+          <p:cNvCxnSpPr/>
+          <p:nvPr/>
+        </p:nvCxnSpPr>
+        <p:spPr>
+          <a:xfrm flipV="1">
+            <a:off x="9692640" y="6080760"/>
+            <a:ext cx="274320" cy="502920"/>
+          </a:xfrm>
+          <a:prstGeom prst="line">
+            <a:avLst/>
+          </a:prstGeom>
+          <a:ln w="18288">
+            <a:solidFill>
+              <a:srgbClr val="6B7280"/>
+            </a:solidFill>
+            <a:tailEnd type="triangle"/>
+          </a:ln>
+        </p:spPr>
+        <p:style>
+          <a:lnRef idx="2">
+            <a:schemeClr val="accent1"/>
+          </a:lnRef>
+          <a:fillRef idx="0">
+            <a:schemeClr val="accent1"/>
+          </a:fillRef>
+          <a:effectRef idx="1">
+            <a:schemeClr val="accent1"/>
+          </a:effectRef>
+          <a:fontRef idx="minor">
+            <a:schemeClr val="tx1"/>
+          </a:fontRef>
+        </p:style>
+      </p:cxnSp>
+      <p:sp>
+        <p:nvSpPr>
+          <p:cNvPr id="24" name="drawio-node-2"/>
+          <p:cNvSpPr txBox="1"/>
+          <p:nvPr/>
+        </p:nvSpPr>
+        <p:spPr>
+          <a:xfrm>
+            <a:off x="2743200" y="182880"/>
+            <a:ext cx="9144000" cy="365760"/>
+          </a:xfrm>
+          <a:prstGeom prst="rect">
+            <a:avLst/>
+          </a:prstGeom>
+          <a:noFill/>
+        </p:spPr>
+        <p:txBody>
+          <a:bodyPr wrap="square" lIns="27432" rIns="27432" tIns="9144" bIns="9144" anchor="ctr">
+            <a:spAutoFit/>
+          </a:bodyPr>
+          <a:lstStyle/>
+          <a:p>
+            <a:pPr algn="ctr">
+              <a:spcBef>
+                <a:spcPts val="0"/>
+              </a:spcBef>
+              <a:spcAft>
+                <a:spcPts val="0"/>
+              </a:spcAft>
+            </a:pPr>
+            <a:r>
+              <a:rPr sz="1872" b="1">
+                <a:solidFill>
+                  <a:srgbClr val="17233C"/>
+                </a:solidFill>
+                <a:latin typeface="Arial"/>
+              </a:rPr>
+              <a:t>Why pair-bagging is not enough</a:t>
+            </a:r>
+          </a:p>
+        </p:txBody>
+      </p:sp>
+      <p:sp>
+        <p:nvSpPr>
+          <p:cNvPr id="25" name="drawio-node-20"/>
+          <p:cNvSpPr/>
+          <p:nvPr/>
+        </p:nvSpPr>
+        <p:spPr>
+          <a:xfrm>
+            <a:off x="1737360" y="1463040"/>
+            <a:ext cx="731520" cy="731520"/>
+          </a:xfrm>
+          <a:prstGeom prst="ellipse">
+            <a:avLst/>
+          </a:prstGeom>
+          <a:solidFill>
+            <a:srgbClr val="D5E8D4"/>
+          </a:solidFill>
+          <a:ln w="18288">
+            <a:solidFill>
+              <a:srgbClr val="6D9E69"/>
+            </a:solidFill>
+          </a:ln>
+        </p:spPr>
+        <p:style>
+          <a:lnRef idx="1">
+            <a:schemeClr val="accent1"/>
+          </a:lnRef>
+          <a:fillRef idx="3">
+            <a:schemeClr val="accent1"/>
+          </a:fillRef>
+          <a:effectRef idx="2">
+            <a:schemeClr val="accent1"/>
+          </a:effectRef>
+          <a:fontRef idx="minor">
+            <a:schemeClr val="lt1"/>
+          </a:fontRef>
+        </p:style>
+        <p:txBody>
+          <a:bodyPr rtlCol="0" anchor="ctr" wrap="square" lIns="27432" rIns="27432" tIns="9144" bIns="9144"/>
+          <a:lstStyle/>
+          <a:p>
+            <a:pPr algn="ctr">
+              <a:spcBef>
+                <a:spcPts val="0"/>
+              </a:spcBef>
+              <a:spcAft>
+                <a:spcPts val="0"/>
+              </a:spcAft>
+            </a:pPr>
+            <a:r>
+              <a:rPr sz="1152" b="1">
+                <a:solidFill>
+                  <a:srgbClr val="000000"/>
+                </a:solidFill>
+                <a:latin typeface="Arial"/>
+              </a:rPr>
+              <a:t>A</a:t>
+            </a:r>
+          </a:p>
+          <a:p>
+            <a:pPr algn="ctr">
+              <a:spcBef>
+                <a:spcPts val="0"/>
+              </a:spcBef>
+              <a:spcAft>
+                <a:spcPts val="0"/>
+              </a:spcAft>
+            </a:pPr>
+            <a:r>
+              <a:rPr sz="1152" b="1">
+                <a:solidFill>
+                  <a:srgbClr val="000000"/>
+                </a:solidFill>
+                <a:latin typeface="Arial"/>
+              </a:rPr>
+              <a:t>m</a:t>
+            </a:r>
+            <a:r>
+              <a:rPr sz="864" b="1" baseline="-25000">
+                <a:solidFill>
+                  <a:srgbClr val="000000"/>
+                </a:solidFill>
+                <a:latin typeface="Arial"/>
+              </a:rPr>
+              <a:t>1</a:t>
+            </a:r>
+          </a:p>
+        </p:txBody>
+      </p:sp>
+      <p:sp>
+        <p:nvSpPr>
+          <p:cNvPr id="26" name="drawio-node-21"/>
+          <p:cNvSpPr/>
+          <p:nvPr/>
+        </p:nvSpPr>
+        <p:spPr>
+          <a:xfrm>
+            <a:off x="5029200" y="1463040"/>
+            <a:ext cx="731520" cy="731520"/>
+          </a:xfrm>
+          <a:prstGeom prst="ellipse">
+            <a:avLst/>
+          </a:prstGeom>
+          <a:solidFill>
+            <a:srgbClr val="D5E8D4"/>
+          </a:solidFill>
+          <a:ln w="18288">
+            <a:solidFill>
+              <a:srgbClr val="6D9E69"/>
+            </a:solidFill>
+          </a:ln>
+        </p:spPr>
+        <p:style>
+          <a:lnRef idx="1">
+            <a:schemeClr val="accent1"/>
+          </a:lnRef>
+          <a:fillRef idx="3">
+            <a:schemeClr val="accent1"/>
+          </a:fillRef>
+          <a:effectRef idx="2">
+            <a:schemeClr val="accent1"/>
+          </a:effectRef>
+          <a:fontRef idx="minor">
+            <a:schemeClr val="lt1"/>
+          </a:fontRef>
+        </p:style>
+        <p:txBody>
+          <a:bodyPr rtlCol="0" anchor="ctr" wrap="square" lIns="27432" rIns="27432" tIns="9144" bIns="9144"/>
+          <a:lstStyle/>
+          <a:p>
+            <a:pPr algn="ctr">
+              <a:spcBef>
+                <a:spcPts val="0"/>
+              </a:spcBef>
+              <a:spcAft>
+                <a:spcPts val="0"/>
+              </a:spcAft>
+            </a:pPr>
+            <a:r>
+              <a:rPr sz="1152" b="1">
+                <a:solidFill>
+                  <a:srgbClr val="000000"/>
+                </a:solidFill>
+                <a:latin typeface="Arial"/>
+              </a:rPr>
+              <a:t>B</a:t>
+            </a:r>
+          </a:p>
+          <a:p>
+            <a:pPr algn="ctr">
+              <a:spcBef>
+                <a:spcPts val="0"/>
+              </a:spcBef>
+              <a:spcAft>
+                <a:spcPts val="0"/>
+              </a:spcAft>
+            </a:pPr>
+            <a:r>
+              <a:rPr sz="1152" b="1">
+                <a:solidFill>
+                  <a:srgbClr val="000000"/>
+                </a:solidFill>
+                <a:latin typeface="Arial"/>
+              </a:rPr>
+              <a:t>m</a:t>
+            </a:r>
+            <a:r>
+              <a:rPr sz="864" b="1" baseline="-25000">
+                <a:solidFill>
+                  <a:srgbClr val="000000"/>
+                </a:solidFill>
+                <a:latin typeface="Arial"/>
+              </a:rPr>
+              <a:t>2</a:t>
+            </a:r>
+          </a:p>
+        </p:txBody>
+      </p:sp>
+      <p:sp>
+        <p:nvSpPr>
+          <p:cNvPr id="27" name="drawio-node-22"/>
+          <p:cNvSpPr/>
+          <p:nvPr/>
+        </p:nvSpPr>
+        <p:spPr>
+          <a:xfrm>
+            <a:off x="1737360" y="3291840"/>
+            <a:ext cx="731520" cy="731520"/>
+          </a:xfrm>
+          <a:prstGeom prst="ellipse">
+            <a:avLst/>
+          </a:prstGeom>
+          <a:solidFill>
+            <a:srgbClr val="D5E8D4"/>
+          </a:solidFill>
+          <a:ln w="18288">
+            <a:solidFill>
+              <a:srgbClr val="6D9E69"/>
+            </a:solidFill>
+          </a:ln>
+        </p:spPr>
+        <p:style>
+          <a:lnRef idx="1">
+            <a:schemeClr val="accent1"/>
+          </a:lnRef>
+          <a:fillRef idx="3">
+            <a:schemeClr val="accent1"/>
+          </a:fillRef>
+          <a:effectRef idx="2">
+            <a:schemeClr val="accent1"/>
+          </a:effectRef>
+          <a:fontRef idx="minor">
+            <a:schemeClr val="lt1"/>
+          </a:fontRef>
+        </p:style>
+        <p:txBody>
+          <a:bodyPr rtlCol="0" anchor="ctr" wrap="square" lIns="27432" rIns="27432" tIns="9144" bIns="9144"/>
+          <a:lstStyle/>
+          <a:p>
+            <a:pPr algn="ctr">
+              <a:spcBef>
+                <a:spcPts val="0"/>
+              </a:spcBef>
+              <a:spcAft>
+                <a:spcPts val="0"/>
+              </a:spcAft>
+            </a:pPr>
+            <a:r>
+              <a:rPr sz="1152" b="1">
+                <a:solidFill>
+                  <a:srgbClr val="000000"/>
+                </a:solidFill>
+                <a:latin typeface="Arial"/>
+              </a:rPr>
+              <a:t>C</a:t>
+            </a:r>
+          </a:p>
+          <a:p>
+            <a:pPr algn="ctr">
+              <a:spcBef>
+                <a:spcPts val="0"/>
+              </a:spcBef>
+              <a:spcAft>
+                <a:spcPts val="0"/>
+              </a:spcAft>
+            </a:pPr>
+            <a:r>
+              <a:rPr sz="1152" b="1">
+                <a:solidFill>
+                  <a:srgbClr val="000000"/>
+                </a:solidFill>
+                <a:latin typeface="Arial"/>
+              </a:rPr>
+              <a:t>m</a:t>
+            </a:r>
+            <a:r>
+              <a:rPr sz="864" b="1" baseline="-25000">
+                <a:solidFill>
+                  <a:srgbClr val="000000"/>
+                </a:solidFill>
+                <a:latin typeface="Arial"/>
+              </a:rPr>
+              <a:t>3</a:t>
+            </a:r>
+          </a:p>
+        </p:txBody>
+      </p:sp>
+      <p:sp>
+        <p:nvSpPr>
+          <p:cNvPr id="28" name="drawio-node-23"/>
+          <p:cNvSpPr/>
+          <p:nvPr/>
+        </p:nvSpPr>
+        <p:spPr>
+          <a:xfrm>
+            <a:off x="5029200" y="3291840"/>
+            <a:ext cx="731520" cy="731520"/>
+          </a:xfrm>
+          <a:prstGeom prst="ellipse">
+            <a:avLst/>
+          </a:prstGeom>
+          <a:solidFill>
+            <a:srgbClr val="D5E8D4"/>
+          </a:solidFill>
+          <a:ln w="18288">
+            <a:solidFill>
+              <a:srgbClr val="6D9E69"/>
+            </a:solidFill>
+          </a:ln>
+        </p:spPr>
+        <p:style>
+          <a:lnRef idx="1">
+            <a:schemeClr val="accent1"/>
+          </a:lnRef>
+          <a:fillRef idx="3">
+            <a:schemeClr val="accent1"/>
+          </a:fillRef>
+          <a:effectRef idx="2">
+            <a:schemeClr val="accent1"/>
+          </a:effectRef>
+          <a:fontRef idx="minor">
+            <a:schemeClr val="lt1"/>
+          </a:fontRef>
+        </p:style>
+        <p:txBody>
+          <a:bodyPr rtlCol="0" anchor="ctr" wrap="square" lIns="27432" rIns="27432" tIns="9144" bIns="9144"/>
+          <a:lstStyle/>
+          <a:p>
+            <a:pPr algn="ctr">
+              <a:spcBef>
+                <a:spcPts val="0"/>
+              </a:spcBef>
+              <a:spcAft>
+                <a:spcPts val="0"/>
+              </a:spcAft>
+            </a:pPr>
+            <a:r>
+              <a:rPr sz="1152" b="1">
+                <a:solidFill>
+                  <a:srgbClr val="000000"/>
+                </a:solidFill>
+                <a:latin typeface="Arial"/>
+              </a:rPr>
+              <a:t>D</a:t>
+            </a:r>
+          </a:p>
+          <a:p>
+            <a:pPr algn="ctr">
+              <a:spcBef>
+                <a:spcPts val="0"/>
+              </a:spcBef>
+              <a:spcAft>
+                <a:spcPts val="0"/>
+              </a:spcAft>
+            </a:pPr>
+            <a:r>
+              <a:rPr sz="1152" b="1">
+                <a:solidFill>
+                  <a:srgbClr val="000000"/>
+                </a:solidFill>
+                <a:latin typeface="Arial"/>
+              </a:rPr>
+              <a:t>m</a:t>
+            </a:r>
+            <a:r>
+              <a:rPr sz="864" b="1" baseline="-25000">
+                <a:solidFill>
+                  <a:srgbClr val="000000"/>
+                </a:solidFill>
+                <a:latin typeface="Arial"/>
+              </a:rPr>
+              <a:t>4</a:t>
+            </a:r>
+          </a:p>
+        </p:txBody>
+      </p:sp>
+      <p:sp>
+        <p:nvSpPr>
+          <p:cNvPr id="29" name="drawio-node-24"/>
+          <p:cNvSpPr/>
+          <p:nvPr/>
+        </p:nvSpPr>
+        <p:spPr>
+          <a:xfrm>
+            <a:off x="1737360" y="4297680"/>
+            <a:ext cx="4023360" cy="457200"/>
+          </a:xfrm>
+          <a:prstGeom prst="roundRect">
+            <a:avLst>
+              <a:gd name="adj" fmla="val 8000"/>
+            </a:avLst>
+          </a:prstGeom>
+          <a:solidFill>
+            <a:srgbClr val="E9F2FC"/>
+          </a:solidFill>
+          <a:ln w="9144">
+            <a:solidFill>
+              <a:srgbClr val="6C8EBF"/>
+            </a:solidFill>
+          </a:ln>
+        </p:spPr>
+        <p:style>
+          <a:lnRef idx="1">
+            <a:schemeClr val="accent1"/>
+          </a:lnRef>
+          <a:fillRef idx="3">
+            <a:schemeClr val="accent1"/>
+          </a:fillRef>
+          <a:effectRef idx="2">
+            <a:schemeClr val="accent1"/>
+          </a:effectRef>
+          <a:fontRef idx="minor">
+            <a:schemeClr val="lt1"/>
+          </a:fontRef>
+        </p:style>
+        <p:txBody>
+          <a:bodyPr rtlCol="0" anchor="ctr" wrap="square" lIns="27432" rIns="27432" tIns="9144" bIns="9144"/>
+          <a:lstStyle/>
+          <a:p>
+            <a:pPr algn="ctr">
+              <a:spcBef>
+                <a:spcPts val="0"/>
+              </a:spcBef>
+              <a:spcAft>
+                <a:spcPts val="0"/>
+              </a:spcAft>
+            </a:pPr>
+            <a:r>
+              <a:rPr sz="1008" b="0">
+                <a:solidFill>
+                  <a:srgbClr val="000000"/>
+                </a:solidFill>
+                <a:latin typeface="Arial"/>
+              </a:rPr>
+              <a:t>Every actor: 1 red + 1 blue + 1 gray incident relation</a:t>
+            </a:r>
+          </a:p>
+        </p:txBody>
+      </p:sp>
+      <p:sp>
+        <p:nvSpPr>
+          <p:cNvPr id="30" name="drawio-node-40"/>
+          <p:cNvSpPr/>
+          <p:nvPr/>
+        </p:nvSpPr>
+        <p:spPr>
+          <a:xfrm>
+            <a:off x="8869680" y="1463040"/>
+            <a:ext cx="731520" cy="731520"/>
+          </a:xfrm>
+          <a:prstGeom prst="ellipse">
+            <a:avLst/>
+          </a:prstGeom>
+          <a:solidFill>
+            <a:srgbClr val="D5E8D4"/>
+          </a:solidFill>
+          <a:ln w="18288">
+            <a:solidFill>
+              <a:srgbClr val="6D9E69"/>
+            </a:solidFill>
+          </a:ln>
+        </p:spPr>
+        <p:style>
+          <a:lnRef idx="1">
+            <a:schemeClr val="accent1"/>
+          </a:lnRef>
+          <a:fillRef idx="3">
+            <a:schemeClr val="accent1"/>
+          </a:fillRef>
+          <a:effectRef idx="2">
+            <a:schemeClr val="accent1"/>
+          </a:effectRef>
+          <a:fontRef idx="minor">
+            <a:schemeClr val="lt1"/>
+          </a:fontRef>
+        </p:style>
+        <p:txBody>
+          <a:bodyPr rtlCol="0" anchor="ctr" wrap="square" lIns="27432" rIns="27432" tIns="9144" bIns="9144"/>
+          <a:lstStyle/>
+          <a:p>
+            <a:pPr algn="ctr">
+              <a:spcBef>
+                <a:spcPts val="0"/>
+              </a:spcBef>
+              <a:spcAft>
+                <a:spcPts val="0"/>
+              </a:spcAft>
+            </a:pPr>
+            <a:r>
+              <a:rPr sz="1152" b="1">
+                <a:solidFill>
+                  <a:srgbClr val="000000"/>
+                </a:solidFill>
+                <a:latin typeface="Arial"/>
+              </a:rPr>
+              <a:t>A</a:t>
+            </a:r>
+          </a:p>
+          <a:p>
+            <a:pPr algn="ctr">
+              <a:spcBef>
+                <a:spcPts val="0"/>
+              </a:spcBef>
+              <a:spcAft>
+                <a:spcPts val="0"/>
+              </a:spcAft>
+            </a:pPr>
+            <a:r>
+              <a:rPr sz="1152" b="1">
+                <a:solidFill>
+                  <a:srgbClr val="000000"/>
+                </a:solidFill>
+                <a:latin typeface="Arial"/>
+              </a:rPr>
+              <a:t>m</a:t>
+            </a:r>
+            <a:r>
+              <a:rPr sz="864" b="1" baseline="-25000">
+                <a:solidFill>
+                  <a:srgbClr val="000000"/>
+                </a:solidFill>
+                <a:latin typeface="Arial"/>
+              </a:rPr>
+              <a:t>1</a:t>
+            </a:r>
+          </a:p>
+        </p:txBody>
+      </p:sp>
+      <p:sp>
+        <p:nvSpPr>
+          <p:cNvPr id="31" name="drawio-node-41"/>
+          <p:cNvSpPr/>
+          <p:nvPr/>
+        </p:nvSpPr>
+        <p:spPr>
+          <a:xfrm>
+            <a:off x="12161520" y="1463040"/>
+            <a:ext cx="731520" cy="731520"/>
+          </a:xfrm>
+          <a:prstGeom prst="ellipse">
+            <a:avLst/>
+          </a:prstGeom>
+          <a:solidFill>
+            <a:srgbClr val="D5E8D4"/>
+          </a:solidFill>
+          <a:ln w="18288">
+            <a:solidFill>
+              <a:srgbClr val="6D9E69"/>
+            </a:solidFill>
+          </a:ln>
+        </p:spPr>
+        <p:style>
+          <a:lnRef idx="1">
+            <a:schemeClr val="accent1"/>
+          </a:lnRef>
+          <a:fillRef idx="3">
+            <a:schemeClr val="accent1"/>
+          </a:fillRef>
+          <a:effectRef idx="2">
+            <a:schemeClr val="accent1"/>
+          </a:effectRef>
+          <a:fontRef idx="minor">
+            <a:schemeClr val="lt1"/>
+          </a:fontRef>
+        </p:style>
+        <p:txBody>
+          <a:bodyPr rtlCol="0" anchor="ctr" wrap="square" lIns="27432" rIns="27432" tIns="9144" bIns="9144"/>
+          <a:lstStyle/>
+          <a:p>
+            <a:pPr algn="ctr">
+              <a:spcBef>
+                <a:spcPts val="0"/>
+              </a:spcBef>
+              <a:spcAft>
+                <a:spcPts val="0"/>
+              </a:spcAft>
+            </a:pPr>
+            <a:r>
+              <a:rPr sz="1152" b="1">
+                <a:solidFill>
+                  <a:srgbClr val="000000"/>
+                </a:solidFill>
+                <a:latin typeface="Arial"/>
+              </a:rPr>
+              <a:t>B</a:t>
+            </a:r>
+          </a:p>
+          <a:p>
+            <a:pPr algn="ctr">
+              <a:spcBef>
+                <a:spcPts val="0"/>
+              </a:spcBef>
+              <a:spcAft>
+                <a:spcPts val="0"/>
+              </a:spcAft>
+            </a:pPr>
+            <a:r>
+              <a:rPr sz="1152" b="1">
+                <a:solidFill>
+                  <a:srgbClr val="000000"/>
+                </a:solidFill>
+                <a:latin typeface="Arial"/>
+              </a:rPr>
+              <a:t>m</a:t>
+            </a:r>
+            <a:r>
+              <a:rPr sz="864" b="1" baseline="-25000">
+                <a:solidFill>
+                  <a:srgbClr val="000000"/>
+                </a:solidFill>
+                <a:latin typeface="Arial"/>
+              </a:rPr>
+              <a:t>2</a:t>
+            </a:r>
+          </a:p>
+        </p:txBody>
+      </p:sp>
+      <p:sp>
+        <p:nvSpPr>
+          <p:cNvPr id="32" name="drawio-node-42"/>
+          <p:cNvSpPr/>
+          <p:nvPr/>
+        </p:nvSpPr>
+        <p:spPr>
+          <a:xfrm>
+            <a:off x="8869680" y="3291840"/>
+            <a:ext cx="731520" cy="731520"/>
+          </a:xfrm>
+          <a:prstGeom prst="ellipse">
+            <a:avLst/>
+          </a:prstGeom>
+          <a:solidFill>
+            <a:srgbClr val="D5E8D4"/>
+          </a:solidFill>
+          <a:ln w="18288">
+            <a:solidFill>
+              <a:srgbClr val="6D9E69"/>
+            </a:solidFill>
+          </a:ln>
+        </p:spPr>
+        <p:style>
+          <a:lnRef idx="1">
+            <a:schemeClr val="accent1"/>
+          </a:lnRef>
+          <a:fillRef idx="3">
+            <a:schemeClr val="accent1"/>
+          </a:fillRef>
+          <a:effectRef idx="2">
+            <a:schemeClr val="accent1"/>
+          </a:effectRef>
+          <a:fontRef idx="minor">
+            <a:schemeClr val="lt1"/>
+          </a:fontRef>
+        </p:style>
+        <p:txBody>
+          <a:bodyPr rtlCol="0" anchor="ctr" wrap="square" lIns="27432" rIns="27432" tIns="9144" bIns="9144"/>
+          <a:lstStyle/>
+          <a:p>
+            <a:pPr algn="ctr">
+              <a:spcBef>
+                <a:spcPts val="0"/>
+              </a:spcBef>
+              <a:spcAft>
+                <a:spcPts val="0"/>
+              </a:spcAft>
+            </a:pPr>
+            <a:r>
+              <a:rPr sz="1152" b="1">
+                <a:solidFill>
+                  <a:srgbClr val="000000"/>
+                </a:solidFill>
+                <a:latin typeface="Arial"/>
+              </a:rPr>
+              <a:t>C</a:t>
+            </a:r>
+          </a:p>
+          <a:p>
+            <a:pPr algn="ctr">
+              <a:spcBef>
+                <a:spcPts val="0"/>
+              </a:spcBef>
+              <a:spcAft>
+                <a:spcPts val="0"/>
+              </a:spcAft>
+            </a:pPr>
+            <a:r>
+              <a:rPr sz="1152" b="1">
+                <a:solidFill>
+                  <a:srgbClr val="000000"/>
+                </a:solidFill>
+                <a:latin typeface="Arial"/>
+              </a:rPr>
+              <a:t>m</a:t>
+            </a:r>
+            <a:r>
+              <a:rPr sz="864" b="1" baseline="-25000">
+                <a:solidFill>
+                  <a:srgbClr val="000000"/>
+                </a:solidFill>
+                <a:latin typeface="Arial"/>
+              </a:rPr>
+              <a:t>3</a:t>
+            </a:r>
+          </a:p>
+        </p:txBody>
+      </p:sp>
+      <p:sp>
+        <p:nvSpPr>
+          <p:cNvPr id="33" name="drawio-node-43"/>
+          <p:cNvSpPr/>
+          <p:nvPr/>
+        </p:nvSpPr>
+        <p:spPr>
+          <a:xfrm>
+            <a:off x="12161520" y="3291840"/>
+            <a:ext cx="731520" cy="731520"/>
+          </a:xfrm>
+          <a:prstGeom prst="ellipse">
+            <a:avLst/>
+          </a:prstGeom>
+          <a:solidFill>
+            <a:srgbClr val="D5E8D4"/>
+          </a:solidFill>
+          <a:ln w="18288">
+            <a:solidFill>
+              <a:srgbClr val="6D9E69"/>
+            </a:solidFill>
+          </a:ln>
+        </p:spPr>
+        <p:style>
+          <a:lnRef idx="1">
+            <a:schemeClr val="accent1"/>
+          </a:lnRef>
+          <a:fillRef idx="3">
+            <a:schemeClr val="accent1"/>
+          </a:fillRef>
+          <a:effectRef idx="2">
+            <a:schemeClr val="accent1"/>
+          </a:effectRef>
+          <a:fontRef idx="minor">
+            <a:schemeClr val="lt1"/>
+          </a:fontRef>
+        </p:style>
+        <p:txBody>
+          <a:bodyPr rtlCol="0" anchor="ctr" wrap="square" lIns="27432" rIns="27432" tIns="9144" bIns="9144"/>
+          <a:lstStyle/>
+          <a:p>
+            <a:pPr algn="ctr">
+              <a:spcBef>
+                <a:spcPts val="0"/>
+              </a:spcBef>
+              <a:spcAft>
+                <a:spcPts val="0"/>
+              </a:spcAft>
+            </a:pPr>
+            <a:r>
+              <a:rPr sz="1152" b="1">
+                <a:solidFill>
+                  <a:srgbClr val="000000"/>
+                </a:solidFill>
+                <a:latin typeface="Arial"/>
+              </a:rPr>
+              <a:t>D</a:t>
+            </a:r>
+          </a:p>
+          <a:p>
+            <a:pPr algn="ctr">
+              <a:spcBef>
+                <a:spcPts val="0"/>
+              </a:spcBef>
+              <a:spcAft>
+                <a:spcPts val="0"/>
+              </a:spcAft>
+            </a:pPr>
+            <a:r>
+              <a:rPr sz="1152" b="1">
+                <a:solidFill>
+                  <a:srgbClr val="000000"/>
+                </a:solidFill>
+                <a:latin typeface="Arial"/>
+              </a:rPr>
+              <a:t>m</a:t>
+            </a:r>
+            <a:r>
+              <a:rPr sz="864" b="1" baseline="-25000">
+                <a:solidFill>
+                  <a:srgbClr val="000000"/>
+                </a:solidFill>
+                <a:latin typeface="Arial"/>
+              </a:rPr>
+              <a:t>4</a:t>
+            </a:r>
+          </a:p>
+        </p:txBody>
+      </p:sp>
+      <p:sp>
+        <p:nvSpPr>
+          <p:cNvPr id="34" name="drawio-node-44"/>
+          <p:cNvSpPr/>
+          <p:nvPr/>
+        </p:nvSpPr>
+        <p:spPr>
+          <a:xfrm>
+            <a:off x="8869680" y="4297680"/>
+            <a:ext cx="4023360" cy="457200"/>
+          </a:xfrm>
+          <a:prstGeom prst="roundRect">
+            <a:avLst>
+              <a:gd name="adj" fmla="val 8000"/>
+            </a:avLst>
+          </a:prstGeom>
+          <a:solidFill>
+            <a:srgbClr val="FCE8E8"/>
+          </a:solidFill>
+          <a:ln w="9144">
+            <a:solidFill>
+              <a:srgbClr val="B85450"/>
+            </a:solidFill>
+          </a:ln>
+        </p:spPr>
+        <p:style>
+          <a:lnRef idx="1">
+            <a:schemeClr val="accent1"/>
+          </a:lnRef>
+          <a:fillRef idx="3">
+            <a:schemeClr val="accent1"/>
+          </a:fillRef>
+          <a:effectRef idx="2">
+            <a:schemeClr val="accent1"/>
+          </a:effectRef>
+          <a:fontRef idx="minor">
+            <a:schemeClr val="lt1"/>
+          </a:fontRef>
+        </p:style>
+        <p:txBody>
+          <a:bodyPr rtlCol="0" anchor="ctr" wrap="square" lIns="27432" rIns="27432" tIns="9144" bIns="9144"/>
+          <a:lstStyle/>
+          <a:p>
+            <a:pPr algn="ctr">
+              <a:spcBef>
+                <a:spcPts val="0"/>
+              </a:spcBef>
+              <a:spcAft>
+                <a:spcPts val="0"/>
+              </a:spcAft>
+            </a:pPr>
+            <a:r>
+              <a:rPr sz="1008" b="0">
+                <a:solidFill>
+                  <a:srgbClr val="000000"/>
+                </a:solidFill>
+                <a:latin typeface="Arial"/>
+              </a:rPr>
+              <a:t>A: 2 red; D: 2 gray; B/C: mixed incident relations</a:t>
+            </a:r>
+          </a:p>
+        </p:txBody>
+      </p:sp>
+      <p:sp>
+        <p:nvSpPr>
+          <p:cNvPr id="35" name="drawio-node-50"/>
+          <p:cNvSpPr/>
+          <p:nvPr/>
+        </p:nvSpPr>
+        <p:spPr>
+          <a:xfrm>
+            <a:off x="822960" y="5394960"/>
+            <a:ext cx="5943600" cy="914400"/>
+          </a:xfrm>
+          <a:prstGeom prst="roundRect">
+            <a:avLst>
+              <a:gd name="adj" fmla="val 8000"/>
+            </a:avLst>
+          </a:prstGeom>
+          <a:solidFill>
+            <a:srgbClr val="FFF2CC"/>
+          </a:solidFill>
+          <a:ln w="18288">
+            <a:solidFill>
+              <a:srgbClr val="D6B656"/>
+            </a:solidFill>
+          </a:ln>
+        </p:spPr>
+        <p:style>
+          <a:lnRef idx="1">
+            <a:schemeClr val="accent1"/>
+          </a:lnRef>
+          <a:fillRef idx="3">
+            <a:schemeClr val="accent1"/>
+          </a:fillRef>
+          <a:effectRef idx="2">
+            <a:schemeClr val="accent1"/>
+          </a:effectRef>
+          <a:fontRef idx="minor">
+            <a:schemeClr val="lt1"/>
+          </a:fontRef>
+        </p:style>
+        <p:txBody>
+          <a:bodyPr rtlCol="0" anchor="ctr" wrap="square" lIns="27432" rIns="27432" tIns="9144" bIns="9144"/>
+          <a:lstStyle/>
+          <a:p>
+            <a:pPr algn="ctr">
+              <a:spcBef>
+                <a:spcPts val="0"/>
+              </a:spcBef>
+              <a:spcAft>
+                <a:spcPts val="0"/>
+              </a:spcAft>
+            </a:pPr>
+            <a:r>
+              <a:rPr sz="1152" b="0">
+                <a:solidFill>
+                  <a:srgbClr val="000000"/>
+                </a:solidFill>
+                <a:latin typeface="Arial"/>
+              </a:rPr>
+              <a:t>Identical actor marginals: {m</a:t>
+            </a:r>
+            <a:r>
+              <a:rPr sz="864" b="0" baseline="-25000">
+                <a:solidFill>
+                  <a:srgbClr val="000000"/>
+                </a:solidFill>
+                <a:latin typeface="Arial"/>
+              </a:rPr>
+              <a:t>1</a:t>
+            </a:r>
+            <a:r>
+              <a:rPr sz="1152" b="0">
+                <a:solidFill>
+                  <a:srgbClr val="000000"/>
+                </a:solidFill>
+                <a:latin typeface="Arial"/>
+              </a:rPr>
+              <a:t>,m</a:t>
+            </a:r>
+            <a:r>
+              <a:rPr sz="864" b="0" baseline="-25000">
+                <a:solidFill>
+                  <a:srgbClr val="000000"/>
+                </a:solidFill>
+                <a:latin typeface="Arial"/>
+              </a:rPr>
+              <a:t>2</a:t>
+            </a:r>
+            <a:r>
+              <a:rPr sz="1152" b="0">
+                <a:solidFill>
+                  <a:srgbClr val="000000"/>
+                </a:solidFill>
+                <a:latin typeface="Arial"/>
+              </a:rPr>
+              <a:t>,m</a:t>
+            </a:r>
+            <a:r>
+              <a:rPr sz="864" b="0" baseline="-25000">
+                <a:solidFill>
+                  <a:srgbClr val="000000"/>
+                </a:solidFill>
+                <a:latin typeface="Arial"/>
+              </a:rPr>
+              <a:t>3</a:t>
+            </a:r>
+            <a:r>
+              <a:rPr sz="1152" b="0">
+                <a:solidFill>
+                  <a:srgbClr val="000000"/>
+                </a:solidFill>
+                <a:latin typeface="Arial"/>
+              </a:rPr>
+              <a:t>,m</a:t>
+            </a:r>
+            <a:r>
+              <a:rPr sz="864" b="0" baseline="-25000">
+                <a:solidFill>
+                  <a:srgbClr val="000000"/>
+                </a:solidFill>
+                <a:latin typeface="Arial"/>
+              </a:rPr>
+              <a:t>4</a:t>
+            </a:r>
+            <a:r>
+              <a:rPr sz="1152" b="0">
+                <a:solidFill>
+                  <a:srgbClr val="000000"/>
+                </a:solidFill>
+                <a:latin typeface="Arial"/>
+              </a:rPr>
+              <a:t>}</a:t>
+            </a:r>
+          </a:p>
+          <a:p>
+            <a:pPr algn="ctr">
+              <a:spcBef>
+                <a:spcPts val="0"/>
+              </a:spcBef>
+              <a:spcAft>
+                <a:spcPts val="0"/>
+              </a:spcAft>
+            </a:pPr>
+            <a:r>
+              <a:rPr sz="1152" b="0">
+                <a:solidFill>
+                  <a:srgbClr val="000000"/>
+                </a:solidFill>
+                <a:latin typeface="Arial"/>
+              </a:rPr>
+              <a:t>Identical pair-token multiset: {red×2, blue×2, gray×2}</a:t>
+            </a:r>
+          </a:p>
+        </p:txBody>
+      </p:sp>
+      <p:sp>
+        <p:nvSpPr>
+          <p:cNvPr id="36" name="drawio-node-51"/>
+          <p:cNvSpPr/>
+          <p:nvPr/>
+        </p:nvSpPr>
+        <p:spPr>
+          <a:xfrm>
+            <a:off x="7223760" y="5394960"/>
+            <a:ext cx="2377440" cy="914400"/>
+          </a:xfrm>
+          <a:prstGeom prst="roundRect">
+            <a:avLst>
+              <a:gd name="adj" fmla="val 8000"/>
+            </a:avLst>
+          </a:prstGeom>
+          <a:solidFill>
+            <a:srgbClr val="F8CECC"/>
+          </a:solidFill>
+          <a:ln w="18288">
+            <a:solidFill>
+              <a:srgbClr val="B85450"/>
+            </a:solidFill>
+          </a:ln>
+        </p:spPr>
+        <p:style>
+          <a:lnRef idx="1">
+            <a:schemeClr val="accent1"/>
+          </a:lnRef>
+          <a:fillRef idx="3">
+            <a:schemeClr val="accent1"/>
+          </a:fillRef>
+          <a:effectRef idx="2">
+            <a:schemeClr val="accent1"/>
+          </a:effectRef>
+          <a:fontRef idx="minor">
+            <a:schemeClr val="lt1"/>
+          </a:fontRef>
+        </p:style>
+        <p:txBody>
+          <a:bodyPr rtlCol="0" anchor="ctr" wrap="square" lIns="27432" rIns="27432" tIns="9144" bIns="9144"/>
+          <a:lstStyle/>
+          <a:p>
+            <a:pPr algn="ctr">
+              <a:spcBef>
+                <a:spcPts val="0"/>
+              </a:spcBef>
+              <a:spcAft>
+                <a:spcPts val="0"/>
+              </a:spcAft>
+            </a:pPr>
+            <a:r>
+              <a:rPr sz="1296" b="1">
+                <a:solidFill>
+                  <a:srgbClr val="000000"/>
+                </a:solidFill>
+                <a:latin typeface="Arial"/>
+              </a:rPr>
+              <a:t>Pair-bag mean</a:t>
+            </a:r>
+          </a:p>
+          <a:p>
+            <a:pPr algn="ctr">
+              <a:spcBef>
+                <a:spcPts val="0"/>
+              </a:spcBef>
+              <a:spcAft>
+                <a:spcPts val="0"/>
+              </a:spcAft>
+            </a:pPr>
+            <a:r>
+              <a:rPr sz="1296" b="1">
+                <a:solidFill>
+                  <a:srgbClr val="000000"/>
+                </a:solidFill>
+                <a:latin typeface="Arial"/>
+              </a:rPr>
+              <a:t>identical</a:t>
+            </a:r>
+          </a:p>
+        </p:txBody>
+      </p:sp>
+      <p:sp>
+        <p:nvSpPr>
+          <p:cNvPr id="37" name="drawio-node-52"/>
+          <p:cNvSpPr/>
+          <p:nvPr/>
+        </p:nvSpPr>
+        <p:spPr>
+          <a:xfrm>
+            <a:off x="9966960" y="5394960"/>
+            <a:ext cx="3840480" cy="914400"/>
+          </a:xfrm>
+          <a:prstGeom prst="roundRect">
+            <a:avLst>
+              <a:gd name="adj" fmla="val 8000"/>
+            </a:avLst>
+          </a:prstGeom>
+          <a:solidFill>
+            <a:srgbClr val="D5E8D4"/>
+          </a:solidFill>
+          <a:ln w="18288">
+            <a:solidFill>
+              <a:srgbClr val="82B366"/>
+            </a:solidFill>
+          </a:ln>
+        </p:spPr>
+        <p:style>
+          <a:lnRef idx="1">
+            <a:schemeClr val="accent1"/>
+          </a:lnRef>
+          <a:fillRef idx="3">
+            <a:schemeClr val="accent1"/>
+          </a:fillRef>
+          <a:effectRef idx="2">
+            <a:schemeClr val="accent1"/>
+          </a:effectRef>
+          <a:fontRef idx="minor">
+            <a:schemeClr val="lt1"/>
+          </a:fontRef>
+        </p:style>
+        <p:txBody>
+          <a:bodyPr rtlCol="0" anchor="ctr" wrap="square" lIns="27432" rIns="27432" tIns="9144" bIns="9144"/>
+          <a:lstStyle/>
+          <a:p>
+            <a:pPr algn="ctr">
+              <a:spcBef>
+                <a:spcPts val="0"/>
+              </a:spcBef>
+              <a:spcAft>
+                <a:spcPts val="0"/>
+              </a:spcAft>
+            </a:pPr>
+            <a:r>
+              <a:rPr sz="1296" b="1">
+                <a:solidFill>
+                  <a:srgbClr val="000000"/>
+                </a:solidFill>
+                <a:latin typeface="Arial"/>
+              </a:rPr>
+              <a:t>PhaseSet incidence moments</a:t>
+            </a:r>
+          </a:p>
+          <a:p>
+            <a:pPr algn="ctr">
+              <a:spcBef>
+                <a:spcPts val="0"/>
+              </a:spcBef>
+              <a:spcAft>
+                <a:spcPts val="0"/>
+              </a:spcAft>
+            </a:pPr>
+            <a:r>
+              <a:rPr sz="1296" b="1">
+                <a:solidFill>
+                  <a:srgbClr val="000000"/>
+                </a:solidFill>
+                <a:latin typeface="Arial"/>
+              </a:rPr>
+              <a:t>distinguishable</a:t>
+            </a:r>
+          </a:p>
+        </p:txBody>
+      </p:sp>
     </p:spTree>
   </p:cSld>
   <p:clrMapOvr>
